--- a/output/wordlabs-move-3day.pptx
+++ b/output/wordlabs-move-3day.pptx
@@ -11241,7 +11241,7 @@
                 <a:ea typeface="Trebuchet MS" pitchFamily="34" charset="-122"/>
                 <a:cs typeface="Trebuchet MS" pitchFamily="34" charset="-120"/>
               </a:rPr>
-              <a:t>oo</a:t>
+              <a:t>o</a:t>
             </a:r>
             <a:endParaRPr lang="en-US" sz="900" dirty="0"/>
           </a:p>
@@ -15725,7 +15725,7 @@
         </p:nvSpPr>
         <p:spPr>
           <a:xfrm>
-            <a:off x="2124837" y="4169664"/>
+            <a:off x="2023872" y="4169664"/>
             <a:ext cx="685800" cy="475488"/>
           </a:xfrm>
           <a:prstGeom prst="rect">
@@ -15752,7 +15752,7 @@
         </p:nvSpPr>
         <p:spPr>
           <a:xfrm>
-            <a:off x="2124837" y="4169664"/>
+            <a:off x="2023872" y="4169664"/>
             <a:ext cx="685800" cy="475488"/>
           </a:xfrm>
           <a:prstGeom prst="rect">
@@ -15791,7 +15791,7 @@
         </p:nvSpPr>
         <p:spPr>
           <a:xfrm>
-            <a:off x="3033522" y="4169664"/>
+            <a:off x="2831592" y="4169664"/>
             <a:ext cx="685800" cy="475488"/>
           </a:xfrm>
           <a:prstGeom prst="rect">
@@ -15818,7 +15818,7 @@
         </p:nvSpPr>
         <p:spPr>
           <a:xfrm>
-            <a:off x="3033522" y="4169664"/>
+            <a:off x="2831592" y="4169664"/>
             <a:ext cx="685800" cy="475488"/>
           </a:xfrm>
           <a:prstGeom prst="rect">
@@ -15843,7 +15843,7 @@
                 <a:ea typeface="Trebuchet MS" pitchFamily="34" charset="-122"/>
                 <a:cs typeface="Trebuchet MS" pitchFamily="34" charset="-120"/>
               </a:rPr>
-              <a:t>oo</a:t>
+              <a:t>o</a:t>
             </a:r>
             <a:endParaRPr lang="en-US" sz="900" dirty="0"/>
           </a:p>
@@ -15857,7 +15857,7 @@
         </p:nvSpPr>
         <p:spPr>
           <a:xfrm>
-            <a:off x="3942207" y="4169664"/>
+            <a:off x="3639312" y="4169664"/>
             <a:ext cx="685800" cy="475488"/>
           </a:xfrm>
           <a:prstGeom prst="rect">
@@ -15884,7 +15884,7 @@
         </p:nvSpPr>
         <p:spPr>
           <a:xfrm>
-            <a:off x="3942207" y="4169664"/>
+            <a:off x="3639312" y="4169664"/>
             <a:ext cx="685800" cy="475488"/>
           </a:xfrm>
           <a:prstGeom prst="rect">
@@ -15923,7 +15923,7 @@
         </p:nvSpPr>
         <p:spPr>
           <a:xfrm>
-            <a:off x="4850892" y="4169664"/>
+            <a:off x="4447032" y="4169664"/>
             <a:ext cx="685800" cy="475488"/>
           </a:xfrm>
           <a:prstGeom prst="rect">
@@ -15950,7 +15950,7 @@
         </p:nvSpPr>
         <p:spPr>
           <a:xfrm>
-            <a:off x="4850892" y="4169664"/>
+            <a:off x="4447032" y="4169664"/>
             <a:ext cx="685800" cy="475488"/>
           </a:xfrm>
           <a:prstGeom prst="rect">
@@ -15975,7 +15975,7 @@
                 <a:ea typeface="Trebuchet MS" pitchFamily="34" charset="-122"/>
                 <a:cs typeface="Trebuchet MS" pitchFamily="34" charset="-120"/>
               </a:rPr>
-              <a:t>m</a:t>
+              <a:t>e</a:t>
             </a:r>
             <a:endParaRPr lang="en-US" sz="900" dirty="0"/>
           </a:p>
@@ -15989,7 +15989,7 @@
         </p:nvSpPr>
         <p:spPr>
           <a:xfrm>
-            <a:off x="5759577" y="4169664"/>
+            <a:off x="5254752" y="4169664"/>
             <a:ext cx="685800" cy="475488"/>
           </a:xfrm>
           <a:prstGeom prst="rect">
@@ -16016,7 +16016,7 @@
         </p:nvSpPr>
         <p:spPr>
           <a:xfrm>
-            <a:off x="5759577" y="4169664"/>
+            <a:off x="5254752" y="4169664"/>
             <a:ext cx="685800" cy="475488"/>
           </a:xfrm>
           <a:prstGeom prst="rect">
@@ -16041,7 +16041,7 @@
                 <a:ea typeface="Trebuchet MS" pitchFamily="34" charset="-122"/>
                 <a:cs typeface="Trebuchet MS" pitchFamily="34" charset="-120"/>
               </a:rPr>
-              <a:t>e</a:t>
+              <a:t>m</a:t>
             </a:r>
             <a:endParaRPr lang="en-US" sz="900" dirty="0"/>
           </a:p>
@@ -16055,7 +16055,7 @@
         </p:nvSpPr>
         <p:spPr>
           <a:xfrm>
-            <a:off x="6668262" y="4169664"/>
+            <a:off x="6062472" y="4169664"/>
             <a:ext cx="685800" cy="475488"/>
           </a:xfrm>
           <a:prstGeom prst="rect">
@@ -16082,7 +16082,7 @@
         </p:nvSpPr>
         <p:spPr>
           <a:xfrm>
-            <a:off x="6668262" y="4169664"/>
+            <a:off x="6062472" y="4169664"/>
             <a:ext cx="685800" cy="475488"/>
           </a:xfrm>
           <a:prstGeom prst="rect">
@@ -16107,7 +16107,7 @@
                 <a:ea typeface="Trebuchet MS" pitchFamily="34" charset="-122"/>
                 <a:cs typeface="Trebuchet MS" pitchFamily="34" charset="-120"/>
               </a:rPr>
-              <a:t>n</a:t>
+              <a:t>e</a:t>
             </a:r>
             <a:endParaRPr lang="en-US" sz="900" dirty="0"/>
           </a:p>
@@ -16121,7 +16121,7 @@
         </p:nvSpPr>
         <p:spPr>
           <a:xfrm>
-            <a:off x="7576947" y="4169664"/>
+            <a:off x="6870192" y="4169664"/>
             <a:ext cx="685800" cy="475488"/>
           </a:xfrm>
           <a:prstGeom prst="rect">
@@ -16148,7 +16148,73 @@
         </p:nvSpPr>
         <p:spPr>
           <a:xfrm>
-            <a:off x="7576947" y="4169664"/>
+            <a:off x="6870192" y="4169664"/>
+            <a:ext cx="685800" cy="475488"/>
+          </a:xfrm>
+          <a:prstGeom prst="rect">
+            <a:avLst/>
+          </a:prstGeom>
+          <a:noFill/>
+          <a:ln/>
+        </p:spPr>
+        <p:txBody>
+          <a:bodyPr wrap="square" lIns="0" tIns="0" rIns="0" bIns="0" rtlCol="0" anchor="ctr"/>
+          <a:lstStyle/>
+          <a:p>
+            <a:pPr algn="ctr" indent="0" marL="0">
+              <a:buNone/>
+            </a:pPr>
+            <a:r>
+              <a:rPr lang="en-US" sz="900" b="1" dirty="0">
+                <a:solidFill>
+                  <a:srgbClr val="9D174D"/>
+                </a:solidFill>
+                <a:latin typeface="Trebuchet MS" pitchFamily="34" charset="0"/>
+                <a:ea typeface="Trebuchet MS" pitchFamily="34" charset="-122"/>
+                <a:cs typeface="Trebuchet MS" pitchFamily="34" charset="-120"/>
+              </a:rPr>
+              <a:t>n</a:t>
+            </a:r>
+            <a:endParaRPr lang="en-US" sz="900" dirty="0"/>
+          </a:p>
+        </p:txBody>
+      </p:sp>
+      <p:sp>
+        <p:nvSpPr>
+          <p:cNvPr id="47" name="Shape 45"/>
+          <p:cNvSpPr/>
+          <p:nvPr/>
+        </p:nvSpPr>
+        <p:spPr>
+          <a:xfrm>
+            <a:off x="7677912" y="4169664"/>
+            <a:ext cx="685800" cy="475488"/>
+          </a:xfrm>
+          <a:prstGeom prst="rect">
+            <a:avLst>
+              <a:gd name="adj" fmla="val 7692"/>
+            </a:avLst>
+          </a:prstGeom>
+          <a:solidFill>
+            <a:srgbClr val="FFFFFF"/>
+          </a:solidFill>
+          <a:ln w="12700">
+            <a:solidFill>
+              <a:srgbClr val="DB2777"/>
+            </a:solidFill>
+            <a:prstDash val="solid"/>
+          </a:ln>
+        </p:spPr>
+      </p:sp>
+      <p:sp>
+        <p:nvSpPr>
+          <p:cNvPr id="48" name="Text 46"/>
+          <p:cNvSpPr/>
+          <p:nvPr/>
+        </p:nvSpPr>
+        <p:spPr>
+          <a:xfrm>
+            <a:off x="7677912" y="4169664"/>
             <a:ext cx="685800" cy="475488"/>
           </a:xfrm>
           <a:prstGeom prst="rect">
@@ -22181,7 +22247,7 @@
                 <a:ea typeface="Trebuchet MS" pitchFamily="34" charset="-122"/>
                 <a:cs typeface="Trebuchet MS" pitchFamily="34" charset="-120"/>
               </a:rPr>
-              <a:t>oo</a:t>
+              <a:t>o</a:t>
             </a:r>
             <a:endParaRPr lang="en-US" sz="900" dirty="0"/>
           </a:p>
@@ -27380,7 +27446,7 @@
         </p:nvSpPr>
         <p:spPr>
           <a:xfrm>
-            <a:off x="2254649" y="4169664"/>
+            <a:off x="2124837" y="4169664"/>
             <a:ext cx="685800" cy="475488"/>
           </a:xfrm>
           <a:prstGeom prst="rect">
@@ -27407,7 +27473,7 @@
         </p:nvSpPr>
         <p:spPr>
           <a:xfrm>
-            <a:off x="2254649" y="4169664"/>
+            <a:off x="2124837" y="4169664"/>
             <a:ext cx="685800" cy="475488"/>
           </a:xfrm>
           <a:prstGeom prst="rect">
@@ -27446,7 +27512,7 @@
         </p:nvSpPr>
         <p:spPr>
           <a:xfrm>
-            <a:off x="3293146" y="4169664"/>
+            <a:off x="3033522" y="4169664"/>
             <a:ext cx="685800" cy="475488"/>
           </a:xfrm>
           <a:prstGeom prst="rect">
@@ -27473,7 +27539,7 @@
         </p:nvSpPr>
         <p:spPr>
           <a:xfrm>
-            <a:off x="3293146" y="4169664"/>
+            <a:off x="3033522" y="4169664"/>
             <a:ext cx="685800" cy="475488"/>
           </a:xfrm>
           <a:prstGeom prst="rect">
@@ -27498,7 +27564,7 @@
                 <a:ea typeface="Trebuchet MS" pitchFamily="34" charset="-122"/>
                 <a:cs typeface="Trebuchet MS" pitchFamily="34" charset="-120"/>
               </a:rPr>
-              <a:t>oo</a:t>
+              <a:t>o</a:t>
             </a:r>
             <a:endParaRPr lang="en-US" sz="900" dirty="0"/>
           </a:p>
@@ -27512,7 +27578,7 @@
         </p:nvSpPr>
         <p:spPr>
           <a:xfrm>
-            <a:off x="4331643" y="4169664"/>
+            <a:off x="3942207" y="4169664"/>
             <a:ext cx="685800" cy="475488"/>
           </a:xfrm>
           <a:prstGeom prst="rect">
@@ -27539,7 +27605,7 @@
         </p:nvSpPr>
         <p:spPr>
           <a:xfrm>
-            <a:off x="4331643" y="4169664"/>
+            <a:off x="3942207" y="4169664"/>
             <a:ext cx="685800" cy="475488"/>
           </a:xfrm>
           <a:prstGeom prst="rect">
@@ -27578,7 +27644,7 @@
         </p:nvSpPr>
         <p:spPr>
           <a:xfrm>
-            <a:off x="5370141" y="4169664"/>
+            <a:off x="4850892" y="4169664"/>
             <a:ext cx="685800" cy="475488"/>
           </a:xfrm>
           <a:prstGeom prst="rect">
@@ -27605,7 +27671,7 @@
         </p:nvSpPr>
         <p:spPr>
           <a:xfrm>
-            <a:off x="5370141" y="4169664"/>
+            <a:off x="4850892" y="4169664"/>
             <a:ext cx="685800" cy="475488"/>
           </a:xfrm>
           <a:prstGeom prst="rect">
@@ -27644,7 +27710,7 @@
         </p:nvSpPr>
         <p:spPr>
           <a:xfrm>
-            <a:off x="6408638" y="4169664"/>
+            <a:off x="5759577" y="4169664"/>
             <a:ext cx="685800" cy="475488"/>
           </a:xfrm>
           <a:prstGeom prst="rect">
@@ -27671,7 +27737,7 @@
         </p:nvSpPr>
         <p:spPr>
           <a:xfrm>
-            <a:off x="6408638" y="4169664"/>
+            <a:off x="5759577" y="4169664"/>
             <a:ext cx="685800" cy="475488"/>
           </a:xfrm>
           <a:prstGeom prst="rect">
@@ -27710,7 +27776,7 @@
         </p:nvSpPr>
         <p:spPr>
           <a:xfrm>
-            <a:off x="7447135" y="4169664"/>
+            <a:off x="6668262" y="4169664"/>
             <a:ext cx="685800" cy="475488"/>
           </a:xfrm>
           <a:prstGeom prst="rect">
@@ -27737,7 +27803,7 @@
         </p:nvSpPr>
         <p:spPr>
           <a:xfrm>
-            <a:off x="7447135" y="4169664"/>
+            <a:off x="6668262" y="4169664"/>
             <a:ext cx="685800" cy="475488"/>
           </a:xfrm>
           <a:prstGeom prst="rect">
@@ -27762,7 +27828,73 @@
                 <a:ea typeface="Trebuchet MS" pitchFamily="34" charset="-122"/>
                 <a:cs typeface="Trebuchet MS" pitchFamily="34" charset="-120"/>
               </a:rPr>
-              <a:t>le</a:t>
+              <a:t>l</a:t>
+            </a:r>
+            <a:endParaRPr lang="en-US" sz="900" dirty="0"/>
+          </a:p>
+        </p:txBody>
+      </p:sp>
+      <p:sp>
+        <p:nvSpPr>
+          <p:cNvPr id="49" name="Shape 47"/>
+          <p:cNvSpPr/>
+          <p:nvPr/>
+        </p:nvSpPr>
+        <p:spPr>
+          <a:xfrm>
+            <a:off x="7576947" y="4169664"/>
+            <a:ext cx="685800" cy="475488"/>
+          </a:xfrm>
+          <a:prstGeom prst="rect">
+            <a:avLst>
+              <a:gd name="adj" fmla="val 7692"/>
+            </a:avLst>
+          </a:prstGeom>
+          <a:solidFill>
+            <a:srgbClr val="FFFFFF"/>
+          </a:solidFill>
+          <a:ln w="12700">
+            <a:solidFill>
+              <a:srgbClr val="DB2777"/>
+            </a:solidFill>
+            <a:prstDash val="solid"/>
+          </a:ln>
+        </p:spPr>
+      </p:sp>
+      <p:sp>
+        <p:nvSpPr>
+          <p:cNvPr id="50" name="Text 48"/>
+          <p:cNvSpPr/>
+          <p:nvPr/>
+        </p:nvSpPr>
+        <p:spPr>
+          <a:xfrm>
+            <a:off x="7576947" y="4169664"/>
+            <a:ext cx="685800" cy="475488"/>
+          </a:xfrm>
+          <a:prstGeom prst="rect">
+            <a:avLst/>
+          </a:prstGeom>
+          <a:noFill/>
+          <a:ln/>
+        </p:spPr>
+        <p:txBody>
+          <a:bodyPr wrap="square" lIns="0" tIns="0" rIns="0" bIns="0" rtlCol="0" anchor="ctr"/>
+          <a:lstStyle/>
+          <a:p>
+            <a:pPr algn="ctr" indent="0" marL="0">
+              <a:buNone/>
+            </a:pPr>
+            <a:r>
+              <a:rPr lang="en-US" sz="900" b="1" dirty="0">
+                <a:solidFill>
+                  <a:srgbClr val="9D174D"/>
+                </a:solidFill>
+                <a:latin typeface="Trebuchet MS" pitchFamily="34" charset="0"/>
+                <a:ea typeface="Trebuchet MS" pitchFamily="34" charset="-122"/>
+                <a:cs typeface="Trebuchet MS" pitchFamily="34" charset="-120"/>
+              </a:rPr>
+              <a:t>e</a:t>
             </a:r>
             <a:endParaRPr lang="en-US" sz="900" dirty="0"/>
           </a:p>
@@ -32236,7 +32368,7 @@
         </p:nvSpPr>
         <p:spPr>
           <a:xfrm>
-            <a:off x="2254649" y="4169664"/>
+            <a:off x="2124837" y="4169664"/>
             <a:ext cx="685800" cy="475488"/>
           </a:xfrm>
           <a:prstGeom prst="rect">
@@ -32263,7 +32395,7 @@
         </p:nvSpPr>
         <p:spPr>
           <a:xfrm>
-            <a:off x="2254649" y="4169664"/>
+            <a:off x="2124837" y="4169664"/>
             <a:ext cx="685800" cy="475488"/>
           </a:xfrm>
           <a:prstGeom prst="rect">
@@ -32302,7 +32434,7 @@
         </p:nvSpPr>
         <p:spPr>
           <a:xfrm>
-            <a:off x="3293146" y="4169664"/>
+            <a:off x="3033522" y="4169664"/>
             <a:ext cx="685800" cy="475488"/>
           </a:xfrm>
           <a:prstGeom prst="rect">
@@ -32329,7 +32461,7 @@
         </p:nvSpPr>
         <p:spPr>
           <a:xfrm>
-            <a:off x="3293146" y="4169664"/>
+            <a:off x="3033522" y="4169664"/>
             <a:ext cx="685800" cy="475488"/>
           </a:xfrm>
           <a:prstGeom prst="rect">
@@ -32368,7 +32500,7 @@
         </p:nvSpPr>
         <p:spPr>
           <a:xfrm>
-            <a:off x="4331643" y="4169664"/>
+            <a:off x="3942207" y="4169664"/>
             <a:ext cx="685800" cy="475488"/>
           </a:xfrm>
           <a:prstGeom prst="rect">
@@ -32395,7 +32527,7 @@
         </p:nvSpPr>
         <p:spPr>
           <a:xfrm>
-            <a:off x="4331643" y="4169664"/>
+            <a:off x="3942207" y="4169664"/>
             <a:ext cx="685800" cy="475488"/>
           </a:xfrm>
           <a:prstGeom prst="rect">
@@ -32434,7 +32566,7 @@
         </p:nvSpPr>
         <p:spPr>
           <a:xfrm>
-            <a:off x="5370141" y="4169664"/>
+            <a:off x="4850892" y="4169664"/>
             <a:ext cx="685800" cy="475488"/>
           </a:xfrm>
           <a:prstGeom prst="rect">
@@ -32461,7 +32593,7 @@
         </p:nvSpPr>
         <p:spPr>
           <a:xfrm>
-            <a:off x="5370141" y="4169664"/>
+            <a:off x="4850892" y="4169664"/>
             <a:ext cx="685800" cy="475488"/>
           </a:xfrm>
           <a:prstGeom prst="rect">
@@ -32486,7 +32618,7 @@
                 <a:ea typeface="Trebuchet MS" pitchFamily="34" charset="-122"/>
                 <a:cs typeface="Trebuchet MS" pitchFamily="34" charset="-120"/>
               </a:rPr>
-              <a:t>oo</a:t>
+              <a:t>o</a:t>
             </a:r>
             <a:endParaRPr lang="en-US" sz="900" dirty="0"/>
           </a:p>
@@ -32500,7 +32632,7 @@
         </p:nvSpPr>
         <p:spPr>
           <a:xfrm>
-            <a:off x="6408638" y="4169664"/>
+            <a:off x="5759577" y="4169664"/>
             <a:ext cx="685800" cy="475488"/>
           </a:xfrm>
           <a:prstGeom prst="rect">
@@ -32527,7 +32659,7 @@
         </p:nvSpPr>
         <p:spPr>
           <a:xfrm>
-            <a:off x="6408638" y="4169664"/>
+            <a:off x="5759577" y="4169664"/>
             <a:ext cx="685800" cy="475488"/>
           </a:xfrm>
           <a:prstGeom prst="rect">
@@ -32566,7 +32698,7 @@
         </p:nvSpPr>
         <p:spPr>
           <a:xfrm>
-            <a:off x="7447135" y="4169664"/>
+            <a:off x="6668262" y="4169664"/>
             <a:ext cx="685800" cy="475488"/>
           </a:xfrm>
           <a:prstGeom prst="rect">
@@ -32593,7 +32725,73 @@
         </p:nvSpPr>
         <p:spPr>
           <a:xfrm>
-            <a:off x="7447135" y="4169664"/>
+            <a:off x="6668262" y="4169664"/>
+            <a:ext cx="685800" cy="475488"/>
+          </a:xfrm>
+          <a:prstGeom prst="rect">
+            <a:avLst/>
+          </a:prstGeom>
+          <a:noFill/>
+          <a:ln/>
+        </p:spPr>
+        <p:txBody>
+          <a:bodyPr wrap="square" lIns="0" tIns="0" rIns="0" bIns="0" rtlCol="0" anchor="ctr"/>
+          <a:lstStyle/>
+          <a:p>
+            <a:pPr algn="ctr" indent="0" marL="0">
+              <a:buNone/>
+            </a:pPr>
+            <a:r>
+              <a:rPr lang="en-US" sz="900" b="1" dirty="0">
+                <a:solidFill>
+                  <a:srgbClr val="9D174D"/>
+                </a:solidFill>
+                <a:latin typeface="Trebuchet MS" pitchFamily="34" charset="0"/>
+                <a:ea typeface="Trebuchet MS" pitchFamily="34" charset="-122"/>
+                <a:cs typeface="Trebuchet MS" pitchFamily="34" charset="-120"/>
+              </a:rPr>
+              <a:t>e</a:t>
+            </a:r>
+            <a:endParaRPr lang="en-US" sz="900" dirty="0"/>
+          </a:p>
+        </p:txBody>
+      </p:sp>
+      <p:sp>
+        <p:nvSpPr>
+          <p:cNvPr id="49" name="Shape 47"/>
+          <p:cNvSpPr/>
+          <p:nvPr/>
+        </p:nvSpPr>
+        <p:spPr>
+          <a:xfrm>
+            <a:off x="7576947" y="4169664"/>
+            <a:ext cx="685800" cy="475488"/>
+          </a:xfrm>
+          <a:prstGeom prst="rect">
+            <a:avLst>
+              <a:gd name="adj" fmla="val 7692"/>
+            </a:avLst>
+          </a:prstGeom>
+          <a:solidFill>
+            <a:srgbClr val="FFFFFF"/>
+          </a:solidFill>
+          <a:ln w="12700">
+            <a:solidFill>
+              <a:srgbClr val="DB2777"/>
+            </a:solidFill>
+            <a:prstDash val="solid"/>
+          </a:ln>
+        </p:spPr>
+      </p:sp>
+      <p:sp>
+        <p:nvSpPr>
+          <p:cNvPr id="50" name="Text 48"/>
+          <p:cNvSpPr/>
+          <p:nvPr/>
+        </p:nvSpPr>
+        <p:spPr>
+          <a:xfrm>
+            <a:off x="7576947" y="4169664"/>
             <a:ext cx="685800" cy="475488"/>
           </a:xfrm>
           <a:prstGeom prst="rect">
@@ -36875,7 +37073,7 @@
                 <a:ea typeface="Calibri" pitchFamily="34" charset="-122"/>
                 <a:cs typeface="Calibri" pitchFamily="34" charset="-120"/>
               </a:rPr>
-              <a:t>1.  The prefix 'un-' in 'unmovable' means 'again'.</a:t>
+              <a:t>1.  The word 'movement' contains the root 'move' and the suffix '-ment'.</a:t>
             </a:r>
             <a:endParaRPr lang="en-US" sz="1300" dirty="0"/>
           </a:p>
@@ -36898,11 +37096,11 @@
             </a:avLst>
           </a:prstGeom>
           <a:solidFill>
-            <a:srgbClr val="FEE2E2"/>
-          </a:solidFill>
-          <a:ln w="12700">
-            <a:solidFill>
-              <a:srgbClr val="DC2626"/>
+            <a:srgbClr val="DCFCE7"/>
+          </a:solidFill>
+          <a:ln w="12700">
+            <a:solidFill>
+              <a:srgbClr val="16A34A"/>
             </a:solidFill>
             <a:prstDash val="solid"/>
           </a:ln>
@@ -36935,13 +37133,13 @@
             <a:r>
               <a:rPr lang="en-US" sz="1100" b="1" dirty="0">
                 <a:solidFill>
-                  <a:srgbClr val="DC2626"/>
+                  <a:srgbClr val="16A34A"/>
                 </a:solidFill>
                 <a:latin typeface="Trebuchet MS" pitchFamily="34" charset="0"/>
                 <a:ea typeface="Trebuchet MS" pitchFamily="34" charset="-122"/>
                 <a:cs typeface="Trebuchet MS" pitchFamily="34" charset="-120"/>
               </a:rPr>
-              <a:t>FALSE</a:t>
+              <a:t>TRUE</a:t>
             </a:r>
             <a:endParaRPr lang="en-US" sz="1100" dirty="0"/>
           </a:p>
@@ -37014,7 +37212,7 @@
                 <a:ea typeface="Calibri" pitchFamily="34" charset="-122"/>
                 <a:cs typeface="Calibri" pitchFamily="34" charset="-120"/>
               </a:rPr>
-              <a:t>2.  Adding '-able' to 'move' makes the word 'movable', meaning able to be moved.</a:t>
+              <a:t>2.  The word 'remove' uses a prefix added to the root 'move'.</a:t>
             </a:r>
             <a:endParaRPr lang="en-US" sz="1300" dirty="0"/>
           </a:p>
@@ -37153,7 +37351,7 @@
                 <a:ea typeface="Calibri" pitchFamily="34" charset="-122"/>
                 <a:cs typeface="Calibri" pitchFamily="34" charset="-120"/>
               </a:rPr>
-              <a:t>3.  The word 'remove' uses a prefix added to the root 'move'.</a:t>
+              <a:t>3.  The root 'move' comes from the ancient Greek language.</a:t>
             </a:r>
             <a:endParaRPr lang="en-US" sz="1300" dirty="0"/>
           </a:p>
@@ -37176,11 +37374,11 @@
             </a:avLst>
           </a:prstGeom>
           <a:solidFill>
-            <a:srgbClr val="DCFCE7"/>
-          </a:solidFill>
-          <a:ln w="12700">
-            <a:solidFill>
-              <a:srgbClr val="16A34A"/>
+            <a:srgbClr val="FEE2E2"/>
+          </a:solidFill>
+          <a:ln w="12700">
+            <a:solidFill>
+              <a:srgbClr val="DC2626"/>
             </a:solidFill>
             <a:prstDash val="solid"/>
           </a:ln>
@@ -37213,13 +37411,13 @@
             <a:r>
               <a:rPr lang="en-US" sz="1100" b="1" dirty="0">
                 <a:solidFill>
-                  <a:srgbClr val="16A34A"/>
+                  <a:srgbClr val="DC2626"/>
                 </a:solidFill>
                 <a:latin typeface="Trebuchet MS" pitchFamily="34" charset="0"/>
                 <a:ea typeface="Trebuchet MS" pitchFamily="34" charset="-122"/>
                 <a:cs typeface="Trebuchet MS" pitchFamily="34" charset="-120"/>
               </a:rPr>
-              <a:t>TRUE</a:t>
+              <a:t>FALSE</a:t>
             </a:r>
             <a:endParaRPr lang="en-US" sz="1100" dirty="0"/>
           </a:p>
@@ -37292,7 +37490,7 @@
                 <a:ea typeface="Calibri" pitchFamily="34" charset="-122"/>
                 <a:cs typeface="Calibri" pitchFamily="34" charset="-120"/>
               </a:rPr>
-              <a:t>4.  The root 'move' comes from the ancient Greek language.</a:t>
+              <a:t>4.  Adding '-able' to 'move' makes the word 'movable', meaning able to be moved.</a:t>
             </a:r>
             <a:endParaRPr lang="en-US" sz="1300" dirty="0"/>
           </a:p>
@@ -37315,11 +37513,11 @@
             </a:avLst>
           </a:prstGeom>
           <a:solidFill>
-            <a:srgbClr val="FEE2E2"/>
-          </a:solidFill>
-          <a:ln w="12700">
-            <a:solidFill>
-              <a:srgbClr val="DC2626"/>
+            <a:srgbClr val="DCFCE7"/>
+          </a:solidFill>
+          <a:ln w="12700">
+            <a:solidFill>
+              <a:srgbClr val="16A34A"/>
             </a:solidFill>
             <a:prstDash val="solid"/>
           </a:ln>
@@ -37352,13 +37550,13 @@
             <a:r>
               <a:rPr lang="en-US" sz="1100" b="1" dirty="0">
                 <a:solidFill>
-                  <a:srgbClr val="DC2626"/>
+                  <a:srgbClr val="16A34A"/>
                 </a:solidFill>
                 <a:latin typeface="Trebuchet MS" pitchFamily="34" charset="0"/>
                 <a:ea typeface="Trebuchet MS" pitchFamily="34" charset="-122"/>
                 <a:cs typeface="Trebuchet MS" pitchFamily="34" charset="-120"/>
               </a:rPr>
-              <a:t>FALSE</a:t>
+              <a:t>TRUE</a:t>
             </a:r>
             <a:endParaRPr lang="en-US" sz="1100" dirty="0"/>
           </a:p>
@@ -37431,7 +37629,7 @@
                 <a:ea typeface="Calibri" pitchFamily="34" charset="-122"/>
                 <a:cs typeface="Calibri" pitchFamily="34" charset="-120"/>
               </a:rPr>
-              <a:t>5.  The word 'movement' contains the root 'move' and the suffix '-ment'.</a:t>
+              <a:t>5.  The prefix 'un-' in 'unmovable' means 'again'.</a:t>
             </a:r>
             <a:endParaRPr lang="en-US" sz="1300" dirty="0"/>
           </a:p>
@@ -37454,11 +37652,11 @@
             </a:avLst>
           </a:prstGeom>
           <a:solidFill>
-            <a:srgbClr val="DCFCE7"/>
-          </a:solidFill>
-          <a:ln w="12700">
-            <a:solidFill>
-              <a:srgbClr val="16A34A"/>
+            <a:srgbClr val="FEE2E2"/>
+          </a:solidFill>
+          <a:ln w="12700">
+            <a:solidFill>
+              <a:srgbClr val="DC2626"/>
             </a:solidFill>
             <a:prstDash val="solid"/>
           </a:ln>
@@ -37491,13 +37689,13 @@
             <a:r>
               <a:rPr lang="en-US" sz="1100" b="1" dirty="0">
                 <a:solidFill>
-                  <a:srgbClr val="16A34A"/>
+                  <a:srgbClr val="DC2626"/>
                 </a:solidFill>
                 <a:latin typeface="Trebuchet MS" pitchFamily="34" charset="0"/>
                 <a:ea typeface="Trebuchet MS" pitchFamily="34" charset="-122"/>
                 <a:cs typeface="Trebuchet MS" pitchFamily="34" charset="-120"/>
               </a:rPr>
-              <a:t>TRUE</a:t>
+              <a:t>FALSE</a:t>
             </a:r>
             <a:endParaRPr lang="en-US" sz="1100" dirty="0"/>
           </a:p>
